--- a/tasks/finalpool/budget-variance-analysis-quarterly/groundtruth_workspace/executive_presentation.pptx
+++ b/tasks/finalpool/budget-variance-analysis-quarterly/groundtruth_workspace/executive_presentation.pptx
@@ -3093,62 +3093,42 @@
       <p:grpSpPr/>
       <p:sp>
         <p:nvSpPr>
-          <p:cNvPr id="2" name="TextBox 1"/>
-          <p:cNvSpPr txBox="1"/>
-          <p:nvPr/>
-        </p:nvSpPr>
-        <p:spPr>
-          <a:xfrm>
-            <a:off x="457200" y="2286000"/>
-            <a:ext cx="8229600" cy="1828800"/>
-          </a:xfrm>
-          <a:prstGeom prst="rect">
-            <a:avLst/>
-          </a:prstGeom>
-          <a:noFill/>
-        </p:spPr>
-        <p:txBody>
-          <a:bodyPr wrap="none">
-            <a:spAutoFit/>
-          </a:bodyPr>
-          <a:lstStyle/>
-          <a:p>
-            <a:pPr>
-              <a:defRPr sz="5400" b="1"/>
-            </a:pPr>
-            <a:r>
-              <a:t>Q3 Budget Variance Analysis</a:t>
-            </a:r>
-          </a:p>
-        </p:txBody>
-      </p:sp>
-      <p:sp>
-        <p:nvSpPr>
-          <p:cNvPr id="3" name="TextBox 2"/>
-          <p:cNvSpPr txBox="1"/>
-          <p:nvPr/>
-        </p:nvSpPr>
-        <p:spPr>
-          <a:xfrm>
-            <a:off x="457200" y="4114800"/>
-            <a:ext cx="8229600" cy="914400"/>
-          </a:xfrm>
-          <a:prstGeom prst="rect">
-            <a:avLst/>
-          </a:prstGeom>
-          <a:noFill/>
-        </p:spPr>
-        <p:txBody>
-          <a:bodyPr wrap="none">
-            <a:spAutoFit/>
-          </a:bodyPr>
-          <a:lstStyle/>
-          <a:p>
-            <a:pPr>
-              <a:defRPr sz="2800"/>
-            </a:pPr>
-            <a:r>
-              <a:t>Year-to-Date Financial Performance Review</a:t>
+          <p:cNvPr id="2" name="Title 1"/>
+          <p:cNvSpPr>
+            <a:spLocks noGrp="1"/>
+          </p:cNvSpPr>
+          <p:nvPr>
+            <p:ph type="title"/>
+          </p:nvPr>
+        </p:nvSpPr>
+        <p:spPr/>
+        <p:txBody>
+          <a:bodyPr/>
+          <a:lstStyle/>
+          <a:p>
+            <a:r>
+              <a:t>Q1 Budget Variance Analysis</a:t>
+            </a:r>
+          </a:p>
+        </p:txBody>
+      </p:sp>
+      <p:sp>
+        <p:nvSpPr>
+          <p:cNvPr id="3" name="Content Placeholder 2"/>
+          <p:cNvSpPr>
+            <a:spLocks noGrp="1"/>
+          </p:cNvSpPr>
+          <p:nvPr>
+            <p:ph idx="1"/>
+          </p:nvPr>
+        </p:nvSpPr>
+        <p:spPr/>
+        <p:txBody>
+          <a:bodyPr/>
+          <a:lstStyle/>
+          <a:p>
+            <a:r>
+              <a:t>First Quarter Financial Performance Review</a:t>
             </a:r>
           </a:p>
         </p:txBody>
@@ -3173,85 +3153,73 @@
       <p:grpSpPr/>
       <p:sp>
         <p:nvSpPr>
-          <p:cNvPr id="2" name="TextBox 1"/>
-          <p:cNvSpPr txBox="1"/>
-          <p:nvPr/>
-        </p:nvSpPr>
-        <p:spPr>
-          <a:xfrm>
-            <a:off x="457200" y="457200"/>
-            <a:ext cx="8229600" cy="731520"/>
-          </a:xfrm>
-          <a:prstGeom prst="rect">
-            <a:avLst/>
-          </a:prstGeom>
-          <a:noFill/>
-        </p:spPr>
-        <p:txBody>
-          <a:bodyPr wrap="none">
-            <a:spAutoFit/>
-          </a:bodyPr>
-          <a:lstStyle/>
-          <a:p>
-            <a:pPr>
-              <a:defRPr sz="4000" b="1"/>
-            </a:pPr>
-            <a:r>
-              <a:t>Q3 Summary - Year-to-Date Results</a:t>
-            </a:r>
-          </a:p>
-        </p:txBody>
-      </p:sp>
-      <p:sp>
-        <p:nvSpPr>
-          <p:cNvPr id="3" name="TextBox 2"/>
-          <p:cNvSpPr txBox="1"/>
-          <p:nvPr/>
-        </p:nvSpPr>
-        <p:spPr>
-          <a:xfrm>
-            <a:off x="457200" y="1371600"/>
-            <a:ext cx="8229600" cy="5029200"/>
-          </a:xfrm>
-          <a:prstGeom prst="rect">
-            <a:avLst/>
-          </a:prstGeom>
-          <a:noFill/>
-        </p:spPr>
-        <p:txBody>
-          <a:bodyPr wrap="square">
-            <a:spAutoFit/>
-          </a:bodyPr>
-          <a:lstStyle/>
-          <a:p>
-            <a:r>
-              <a:t>Total YTD Budget: 8,115,000</a:t>
-            </a:r>
-          </a:p>
-          <a:p>
-            <a:r>
-              <a:t>Total YTD Actual: 8,196,000</a:t>
-            </a:r>
-          </a:p>
-          <a:p>
-            <a:r>
-              <a:t>Total Variance: +81,000 (1.0% unfavorable)</a:t>
+          <p:cNvPr id="2" name="Title 1"/>
+          <p:cNvSpPr>
+            <a:spLocks noGrp="1"/>
+          </p:cNvSpPr>
+          <p:nvPr>
+            <p:ph type="title"/>
+          </p:nvPr>
+        </p:nvSpPr>
+        <p:spPr/>
+        <p:txBody>
+          <a:bodyPr/>
+          <a:lstStyle/>
+          <a:p>
+            <a:r>
+              <a:t>Q1 Summary - Results</a:t>
+            </a:r>
+          </a:p>
+        </p:txBody>
+      </p:sp>
+      <p:sp>
+        <p:nvSpPr>
+          <p:cNvPr id="3" name="Content Placeholder 2"/>
+          <p:cNvSpPr>
+            <a:spLocks noGrp="1"/>
+          </p:cNvSpPr>
+          <p:nvPr>
+            <p:ph idx="1"/>
+          </p:nvPr>
+        </p:nvSpPr>
+        <p:spPr/>
+        <p:txBody>
+          <a:bodyPr/>
+          <a:lstStyle/>
+          <a:p>
+            <a:r>
+              <a:t>Total Q1 Budget: 2,295,000</a:t>
+            </a:r>
+          </a:p>
+          <a:p>
+            <a:r>
+              <a:t>Total Q1 Actual: 2,314,500</a:t>
+            </a:r>
+          </a:p>
+          <a:p>
+            <a:r>
+              <a:t>Total Variance: +19,500 (0.8% unfavorable)</a:t>
             </a:r>
           </a:p>
           <a:p/>
           <a:p>
             <a:r>
-              <a:t>• 4 of 10 line items on budget or favorable</a:t>
-            </a:r>
-          </a:p>
-          <a:p>
-            <a:r>
-              <a:t>• 6 of 10 line items showing unfavorable variance</a:t>
-            </a:r>
-          </a:p>
-          <a:p>
-            <a:r>
-              <a:t>• Largest variances in commissions and marketing campaigns</a:t>
+              <a:t>5 of 10 line items showing unfavorable variance</a:t>
+            </a:r>
+          </a:p>
+          <a:p>
+            <a:r>
+              <a:t>3 of 10 line items favorable (under budget)</a:t>
+            </a:r>
+          </a:p>
+          <a:p>
+            <a:r>
+              <a:t>2 of 10 line items on budget</a:t>
+            </a:r>
+          </a:p>
+          <a:p>
+            <a:r>
+              <a:t>Largest variances in commissions and marketing campaigns</a:t>
             </a:r>
           </a:p>
         </p:txBody>
@@ -3276,29 +3244,19 @@
       <p:grpSpPr/>
       <p:sp>
         <p:nvSpPr>
-          <p:cNvPr id="2" name="TextBox 1"/>
-          <p:cNvSpPr txBox="1"/>
-          <p:nvPr/>
-        </p:nvSpPr>
-        <p:spPr>
-          <a:xfrm>
-            <a:off x="457200" y="457200"/>
-            <a:ext cx="8229600" cy="731520"/>
-          </a:xfrm>
-          <a:prstGeom prst="rect">
-            <a:avLst/>
-          </a:prstGeom>
-          <a:noFill/>
-        </p:spPr>
-        <p:txBody>
-          <a:bodyPr wrap="none">
-            <a:spAutoFit/>
-          </a:bodyPr>
-          <a:lstStyle/>
-          <a:p>
-            <a:pPr>
-              <a:defRPr sz="4000" b="1"/>
-            </a:pPr>
+          <p:cNvPr id="2" name="Title 1"/>
+          <p:cNvSpPr>
+            <a:spLocks noGrp="1"/>
+          </p:cNvSpPr>
+          <p:nvPr>
+            <p:ph type="title"/>
+          </p:nvPr>
+        </p:nvSpPr>
+        <p:spPr/>
+        <p:txBody>
+          <a:bodyPr/>
+          <a:lstStyle/>
+          <a:p>
             <a:r>
               <a:t>Departmental Performance</a:t>
             </a:r>
@@ -3307,49 +3265,42 @@
       </p:sp>
       <p:sp>
         <p:nvSpPr>
-          <p:cNvPr id="3" name="TextBox 2"/>
-          <p:cNvSpPr txBox="1"/>
-          <p:nvPr/>
-        </p:nvSpPr>
-        <p:spPr>
-          <a:xfrm>
-            <a:off x="457200" y="1371600"/>
-            <a:ext cx="8229600" cy="5029200"/>
-          </a:xfrm>
-          <a:prstGeom prst="rect">
-            <a:avLst/>
-          </a:prstGeom>
-          <a:noFill/>
-        </p:spPr>
-        <p:txBody>
-          <a:bodyPr wrap="square">
-            <a:spAutoFit/>
-          </a:bodyPr>
-          <a:lstStyle/>
-          <a:p>
-            <a:r>
-              <a:t>Operations: 0.6% unfavorable (15,000)</a:t>
-            </a:r>
-          </a:p>
-          <a:p>
-            <a:r>
-              <a:t>Sales: 2.5% unfavorable (58,500) - strong revenue drive</a:t>
-            </a:r>
-          </a:p>
-          <a:p>
-            <a:r>
-              <a:t>Marketing: 3.3% unfavorable (45,000) - campaign acceleration</a:t>
-            </a:r>
-          </a:p>
-          <a:p>
-            <a:r>
-              <a:t>IT: 1.7% unfavorable (15,000) - emergency infrastructure</a:t>
+          <p:cNvPr id="3" name="Content Placeholder 2"/>
+          <p:cNvSpPr>
+            <a:spLocks noGrp="1"/>
+          </p:cNvSpPr>
+          <p:nvPr>
+            <p:ph idx="1"/>
+          </p:nvPr>
+        </p:nvSpPr>
+        <p:spPr/>
+        <p:txBody>
+          <a:bodyPr/>
+          <a:lstStyle/>
+          <a:p>
+            <a:r>
+              <a:t>Operations: 0.8% favorable (-6,000)</a:t>
+            </a:r>
+          </a:p>
+          <a:p>
+            <a:r>
+              <a:t>Sales: 1.4% unfavorable (10,500) - strong revenue drive</a:t>
+            </a:r>
+          </a:p>
+          <a:p>
+            <a:r>
+              <a:t>Marketing: 3.3% unfavorable (15,000) - campaign acceleration</a:t>
+            </a:r>
+          </a:p>
+          <a:p>
+            <a:r>
+              <a:t>IT: on budget (0) - emergency infrastructure offset</a:t>
             </a:r>
           </a:p>
           <a:p/>
           <a:p>
             <a:r>
-              <a:t>Status: All variances within acceptable parameters</a:t>
+              <a:t>Status: variances within acceptable parameters</a:t>
             </a:r>
           </a:p>
         </p:txBody>
@@ -3374,29 +3325,19 @@
       <p:grpSpPr/>
       <p:sp>
         <p:nvSpPr>
-          <p:cNvPr id="2" name="TextBox 1"/>
-          <p:cNvSpPr txBox="1"/>
-          <p:nvPr/>
-        </p:nvSpPr>
-        <p:spPr>
-          <a:xfrm>
-            <a:off x="457200" y="457200"/>
-            <a:ext cx="8229600" cy="731520"/>
-          </a:xfrm>
-          <a:prstGeom prst="rect">
-            <a:avLst/>
-          </a:prstGeom>
-          <a:noFill/>
-        </p:spPr>
-        <p:txBody>
-          <a:bodyPr wrap="none">
-            <a:spAutoFit/>
-          </a:bodyPr>
-          <a:lstStyle/>
-          <a:p>
-            <a:pPr>
-              <a:defRPr sz="4000" b="1"/>
-            </a:pPr>
+          <p:cNvPr id="2" name="Title 1"/>
+          <p:cNvSpPr>
+            <a:spLocks noGrp="1"/>
+          </p:cNvSpPr>
+          <p:nvPr>
+            <p:ph type="title"/>
+          </p:nvPr>
+        </p:nvSpPr>
+        <p:spPr/>
+        <p:txBody>
+          <a:bodyPr/>
+          <a:lstStyle/>
+          <a:p>
             <a:r>
               <a:t>Strategic Recommendations</a:t>
             </a:r>
@@ -3405,24 +3346,17 @@
       </p:sp>
       <p:sp>
         <p:nvSpPr>
-          <p:cNvPr id="3" name="TextBox 2"/>
-          <p:cNvSpPr txBox="1"/>
-          <p:nvPr/>
-        </p:nvSpPr>
-        <p:spPr>
-          <a:xfrm>
-            <a:off x="457200" y="1371600"/>
-            <a:ext cx="8229600" cy="5029200"/>
-          </a:xfrm>
-          <a:prstGeom prst="rect">
-            <a:avLst/>
-          </a:prstGeom>
-          <a:noFill/>
-        </p:spPr>
-        <p:txBody>
-          <a:bodyPr wrap="square">
-            <a:spAutoFit/>
-          </a:bodyPr>
+          <p:cNvPr id="3" name="Content Placeholder 2"/>
+          <p:cNvSpPr>
+            <a:spLocks noGrp="1"/>
+          </p:cNvSpPr>
+          <p:nvPr>
+            <p:ph idx="1"/>
+          </p:nvPr>
+        </p:nvSpPr>
+        <p:spPr/>
+        <p:txBody>
+          <a:bodyPr/>
           <a:lstStyle/>
           <a:p>
             <a:r>
@@ -3450,7 +3384,7 @@
           <a:p/>
           <a:p>
             <a:r>
-              <a:t>5. Implement recommended controls to achieve Q4 budget alignment</a:t>
+              <a:t>5. Implement recommended controls to achieve budget alignment in Q2</a:t>
             </a:r>
           </a:p>
         </p:txBody>
